--- a/slides/spark/pyspark/dataframes_slides/Lecture_Notes/10.external_data_sources_in_spark.pptx
+++ b/slides/spark/pyspark/dataframes_slides/Lecture_Notes/10.external_data_sources_in_spark.pptx
@@ -5,10 +5,10 @@
     <p:sldMasterId id="2147483677" r:id="rId1"/>
   </p:sldMasterIdLst>
   <p:notesMasterIdLst>
-    <p:notesMasterId r:id="rId52"/>
+    <p:notesMasterId r:id="rId55"/>
   </p:notesMasterIdLst>
   <p:handoutMasterIdLst>
-    <p:handoutMasterId r:id="rId53"/>
+    <p:handoutMasterId r:id="rId56"/>
   </p:handoutMasterIdLst>
   <p:sldIdLst>
     <p:sldId id="265" r:id="rId2"/>
@@ -61,6 +61,9 @@
     <p:sldId id="414" r:id="rId49"/>
     <p:sldId id="420" r:id="rId50"/>
     <p:sldId id="418" r:id="rId51"/>
+    <p:sldId id="960" r:id="rId52"/>
+    <p:sldId id="961" r:id="rId53"/>
+    <p:sldId id="962" r:id="rId54"/>
   </p:sldIdLst>
   <p:sldSz cx="9144000" cy="5143500" type="screen16x9"/>
   <p:notesSz cx="6858000" cy="9144000"/>
@@ -566,7 +569,7 @@
           <a:p>
             <a:fld id="{B9BF1A25-DA02-B94D-83E7-38F452A4DD0B}" type="datetimeFigureOut">
               <a:rPr lang="en-US" smtClean="0"/>
-              <a:t>2/25/23</a:t>
+              <a:t>9/3/26</a:t>
             </a:fld>
             <a:endParaRPr lang="en-US" dirty="0"/>
           </a:p>
@@ -732,7 +735,7 @@
           <a:p>
             <a:fld id="{773D608E-326B-064D-8838-D0E4D51BA537}" type="datetimeFigureOut">
               <a:rPr lang="en-US" smtClean="0"/>
-              <a:t>2/25/23</a:t>
+              <a:t>9/3/26</a:t>
             </a:fld>
             <a:endParaRPr lang="en-US" dirty="0"/>
           </a:p>
@@ -1327,6 +1330,276 @@
     <p:extLst>
       <p:ext uri="{BB962C8B-B14F-4D97-AF65-F5344CB8AC3E}">
         <p14:creationId xmlns:p14="http://schemas.microsoft.com/office/powerpoint/2010/main" val="3761489257"/>
+      </p:ext>
+    </p:extLst>
+  </p:cSld>
+  <p:clrMapOvr>
+    <a:masterClrMapping/>
+  </p:clrMapOvr>
+</p:notes>
+</file>
+
+<file path=ppt/notesSlides/notesSlide13.xml><?xml version="1.0" encoding="utf-8"?>
+<p:notes xmlns:a="http://schemas.openxmlformats.org/drawingml/2006/main" xmlns:r="http://schemas.openxmlformats.org/officeDocument/2006/relationships" xmlns:p="http://schemas.openxmlformats.org/presentationml/2006/main">
+  <p:cSld>
+    <p:spTree>
+      <p:nvGrpSpPr>
+        <p:cNvPr id="1" name=""/>
+        <p:cNvGrpSpPr/>
+        <p:nvPr/>
+      </p:nvGrpSpPr>
+      <p:grpSpPr>
+        <a:xfrm>
+          <a:off x="0" y="0"/>
+          <a:ext cx="0" cy="0"/>
+          <a:chOff x="0" y="0"/>
+          <a:chExt cx="0" cy="0"/>
+        </a:xfrm>
+      </p:grpSpPr>
+      <p:sp>
+        <p:nvSpPr>
+          <p:cNvPr id="2" name="Slide Image Placeholder 1"/>
+          <p:cNvSpPr>
+            <a:spLocks noGrp="1" noRot="1" noChangeAspect="1"/>
+          </p:cNvSpPr>
+          <p:nvPr>
+            <p:ph type="sldImg"/>
+          </p:nvPr>
+        </p:nvSpPr>
+        <p:spPr/>
+      </p:sp>
+      <p:sp>
+        <p:nvSpPr>
+          <p:cNvPr id="3" name="Notes Placeholder 2"/>
+          <p:cNvSpPr>
+            <a:spLocks noGrp="1"/>
+          </p:cNvSpPr>
+          <p:nvPr>
+            <p:ph type="body" idx="1"/>
+          </p:nvPr>
+        </p:nvSpPr>
+        <p:spPr/>
+        <p:txBody>
+          <a:bodyPr/>
+          <a:lstStyle/>
+          <a:p>
+            <a:endParaRPr lang="en-US" dirty="0"/>
+          </a:p>
+        </p:txBody>
+      </p:sp>
+      <p:sp>
+        <p:nvSpPr>
+          <p:cNvPr id="4" name="Slide Number Placeholder 3"/>
+          <p:cNvSpPr>
+            <a:spLocks noGrp="1"/>
+          </p:cNvSpPr>
+          <p:nvPr>
+            <p:ph type="sldNum" sz="quarter" idx="10"/>
+          </p:nvPr>
+        </p:nvSpPr>
+        <p:spPr/>
+        <p:txBody>
+          <a:bodyPr/>
+          <a:lstStyle/>
+          <a:p>
+            <a:pPr>
+              <a:defRPr/>
+            </a:pPr>
+            <a:fld id="{9B7C4FBC-5220-9747-9139-414F213DFDAF}" type="slidenum">
+              <a:rPr lang="en-US" smtClean="0"/>
+              <a:pPr>
+                <a:defRPr/>
+              </a:pPr>
+              <a:t>51</a:t>
+            </a:fld>
+            <a:endParaRPr lang="en-US"/>
+          </a:p>
+        </p:txBody>
+      </p:sp>
+    </p:spTree>
+    <p:extLst>
+      <p:ext uri="{BB962C8B-B14F-4D97-AF65-F5344CB8AC3E}">
+        <p14:creationId xmlns:p14="http://schemas.microsoft.com/office/powerpoint/2010/main" val="1656349899"/>
+      </p:ext>
+    </p:extLst>
+  </p:cSld>
+  <p:clrMapOvr>
+    <a:masterClrMapping/>
+  </p:clrMapOvr>
+</p:notes>
+</file>
+
+<file path=ppt/notesSlides/notesSlide14.xml><?xml version="1.0" encoding="utf-8"?>
+<p:notes xmlns:a="http://schemas.openxmlformats.org/drawingml/2006/main" xmlns:r="http://schemas.openxmlformats.org/officeDocument/2006/relationships" xmlns:p="http://schemas.openxmlformats.org/presentationml/2006/main">
+  <p:cSld>
+    <p:spTree>
+      <p:nvGrpSpPr>
+        <p:cNvPr id="1" name=""/>
+        <p:cNvGrpSpPr/>
+        <p:nvPr/>
+      </p:nvGrpSpPr>
+      <p:grpSpPr>
+        <a:xfrm>
+          <a:off x="0" y="0"/>
+          <a:ext cx="0" cy="0"/>
+          <a:chOff x="0" y="0"/>
+          <a:chExt cx="0" cy="0"/>
+        </a:xfrm>
+      </p:grpSpPr>
+      <p:sp>
+        <p:nvSpPr>
+          <p:cNvPr id="2" name="Slide Image Placeholder 1"/>
+          <p:cNvSpPr>
+            <a:spLocks noGrp="1" noRot="1" noChangeAspect="1"/>
+          </p:cNvSpPr>
+          <p:nvPr>
+            <p:ph type="sldImg"/>
+          </p:nvPr>
+        </p:nvSpPr>
+        <p:spPr/>
+      </p:sp>
+      <p:sp>
+        <p:nvSpPr>
+          <p:cNvPr id="3" name="Notes Placeholder 2"/>
+          <p:cNvSpPr>
+            <a:spLocks noGrp="1"/>
+          </p:cNvSpPr>
+          <p:nvPr>
+            <p:ph type="body" idx="1"/>
+          </p:nvPr>
+        </p:nvSpPr>
+        <p:spPr/>
+        <p:txBody>
+          <a:bodyPr/>
+          <a:lstStyle/>
+          <a:p>
+            <a:endParaRPr lang="en-US" dirty="0"/>
+          </a:p>
+        </p:txBody>
+      </p:sp>
+      <p:sp>
+        <p:nvSpPr>
+          <p:cNvPr id="4" name="Slide Number Placeholder 3"/>
+          <p:cNvSpPr>
+            <a:spLocks noGrp="1"/>
+          </p:cNvSpPr>
+          <p:nvPr>
+            <p:ph type="sldNum" sz="quarter" idx="10"/>
+          </p:nvPr>
+        </p:nvSpPr>
+        <p:spPr/>
+        <p:txBody>
+          <a:bodyPr/>
+          <a:lstStyle/>
+          <a:p>
+            <a:pPr>
+              <a:defRPr/>
+            </a:pPr>
+            <a:fld id="{9B7C4FBC-5220-9747-9139-414F213DFDAF}" type="slidenum">
+              <a:rPr lang="en-US" smtClean="0"/>
+              <a:pPr>
+                <a:defRPr/>
+              </a:pPr>
+              <a:t>52</a:t>
+            </a:fld>
+            <a:endParaRPr lang="en-US"/>
+          </a:p>
+        </p:txBody>
+      </p:sp>
+    </p:spTree>
+    <p:extLst>
+      <p:ext uri="{BB962C8B-B14F-4D97-AF65-F5344CB8AC3E}">
+        <p14:creationId xmlns:p14="http://schemas.microsoft.com/office/powerpoint/2010/main" val="1580204670"/>
+      </p:ext>
+    </p:extLst>
+  </p:cSld>
+  <p:clrMapOvr>
+    <a:masterClrMapping/>
+  </p:clrMapOvr>
+</p:notes>
+</file>
+
+<file path=ppt/notesSlides/notesSlide15.xml><?xml version="1.0" encoding="utf-8"?>
+<p:notes xmlns:a="http://schemas.openxmlformats.org/drawingml/2006/main" xmlns:r="http://schemas.openxmlformats.org/officeDocument/2006/relationships" xmlns:p="http://schemas.openxmlformats.org/presentationml/2006/main">
+  <p:cSld>
+    <p:spTree>
+      <p:nvGrpSpPr>
+        <p:cNvPr id="1" name=""/>
+        <p:cNvGrpSpPr/>
+        <p:nvPr/>
+      </p:nvGrpSpPr>
+      <p:grpSpPr>
+        <a:xfrm>
+          <a:off x="0" y="0"/>
+          <a:ext cx="0" cy="0"/>
+          <a:chOff x="0" y="0"/>
+          <a:chExt cx="0" cy="0"/>
+        </a:xfrm>
+      </p:grpSpPr>
+      <p:sp>
+        <p:nvSpPr>
+          <p:cNvPr id="2" name="Slide Image Placeholder 1"/>
+          <p:cNvSpPr>
+            <a:spLocks noGrp="1" noRot="1" noChangeAspect="1"/>
+          </p:cNvSpPr>
+          <p:nvPr>
+            <p:ph type="sldImg"/>
+          </p:nvPr>
+        </p:nvSpPr>
+        <p:spPr/>
+      </p:sp>
+      <p:sp>
+        <p:nvSpPr>
+          <p:cNvPr id="3" name="Notes Placeholder 2"/>
+          <p:cNvSpPr>
+            <a:spLocks noGrp="1"/>
+          </p:cNvSpPr>
+          <p:nvPr>
+            <p:ph type="body" idx="1"/>
+          </p:nvPr>
+        </p:nvSpPr>
+        <p:spPr/>
+        <p:txBody>
+          <a:bodyPr/>
+          <a:lstStyle/>
+          <a:p>
+            <a:endParaRPr lang="en-US" dirty="0"/>
+          </a:p>
+        </p:txBody>
+      </p:sp>
+      <p:sp>
+        <p:nvSpPr>
+          <p:cNvPr id="4" name="Slide Number Placeholder 3"/>
+          <p:cNvSpPr>
+            <a:spLocks noGrp="1"/>
+          </p:cNvSpPr>
+          <p:nvPr>
+            <p:ph type="sldNum" sz="quarter" idx="10"/>
+          </p:nvPr>
+        </p:nvSpPr>
+        <p:spPr/>
+        <p:txBody>
+          <a:bodyPr/>
+          <a:lstStyle/>
+          <a:p>
+            <a:pPr>
+              <a:defRPr/>
+            </a:pPr>
+            <a:fld id="{9B7C4FBC-5220-9747-9139-414F213DFDAF}" type="slidenum">
+              <a:rPr lang="en-US" smtClean="0"/>
+              <a:pPr>
+                <a:defRPr/>
+              </a:pPr>
+              <a:t>53</a:t>
+            </a:fld>
+            <a:endParaRPr lang="en-US"/>
+          </a:p>
+        </p:txBody>
+      </p:sp>
+    </p:spTree>
+    <p:extLst>
+      <p:ext uri="{BB962C8B-B14F-4D97-AF65-F5344CB8AC3E}">
+        <p14:creationId xmlns:p14="http://schemas.microsoft.com/office/powerpoint/2010/main" val="4253483803"/>
       </p:ext>
     </p:extLst>
   </p:cSld>
@@ -24787,6 +25060,539 @@
       </p:par>
     </p:tnLst>
   </p:timing>
+</p:sld>
+</file>
+
+<file path=ppt/slides/slide51.xml><?xml version="1.0" encoding="utf-8"?>
+<p:sld xmlns:a="http://schemas.openxmlformats.org/drawingml/2006/main" xmlns:r="http://schemas.openxmlformats.org/officeDocument/2006/relationships" xmlns:p="http://schemas.openxmlformats.org/presentationml/2006/main">
+  <p:cSld>
+    <p:spTree>
+      <p:nvGrpSpPr>
+        <p:cNvPr id="1" name=""/>
+        <p:cNvGrpSpPr/>
+        <p:nvPr/>
+      </p:nvGrpSpPr>
+      <p:grpSpPr>
+        <a:xfrm>
+          <a:off x="0" y="0"/>
+          <a:ext cx="0" cy="0"/>
+          <a:chOff x="0" y="0"/>
+          <a:chExt cx="0" cy="0"/>
+        </a:xfrm>
+      </p:grpSpPr>
+      <p:sp>
+        <p:nvSpPr>
+          <p:cNvPr id="3" name="Content Placeholder 2"/>
+          <p:cNvSpPr>
+            <a:spLocks noGrp="1"/>
+          </p:cNvSpPr>
+          <p:nvPr>
+            <p:ph idx="1"/>
+          </p:nvPr>
+        </p:nvSpPr>
+        <p:spPr>
+          <a:xfrm>
+            <a:off x="541991" y="424329"/>
+            <a:ext cx="7172325" cy="3968377"/>
+          </a:xfrm>
+        </p:spPr>
+        <p:txBody>
+          <a:bodyPr>
+            <a:normAutofit/>
+          </a:bodyPr>
+          <a:lstStyle/>
+          <a:p>
+            <a:pPr marL="0" marR="0" lvl="0" indent="0" defTabSz="914400" eaLnBrk="1" fontAlgn="auto" latinLnBrk="0" hangingPunct="1">
+              <a:lnSpc>
+                <a:spcPct val="100000"/>
+              </a:lnSpc>
+              <a:spcBef>
+                <a:spcPts val="0"/>
+              </a:spcBef>
+              <a:spcAft>
+                <a:spcPts val="0"/>
+              </a:spcAft>
+              <a:buClrTx/>
+              <a:buSzTx/>
+              <a:buFontTx/>
+              <a:buNone/>
+              <a:tabLst/>
+              <a:defRPr/>
+            </a:pPr>
+            <a:r>
+              <a:rPr lang="en-US" sz="3600" dirty="0"/>
+              <a:t>External Data Sources</a:t>
+            </a:r>
+          </a:p>
+          <a:p>
+            <a:pPr marL="0" marR="0" lvl="0" indent="0" defTabSz="914400" eaLnBrk="1" fontAlgn="auto" latinLnBrk="0" hangingPunct="1">
+              <a:lnSpc>
+                <a:spcPct val="100000"/>
+              </a:lnSpc>
+              <a:spcBef>
+                <a:spcPts val="0"/>
+              </a:spcBef>
+              <a:spcAft>
+                <a:spcPts val="0"/>
+              </a:spcAft>
+              <a:buClrTx/>
+              <a:buSzTx/>
+              <a:buFontTx/>
+              <a:buNone/>
+              <a:tabLst/>
+              <a:defRPr/>
+            </a:pPr>
+            <a:r>
+              <a:rPr lang="en-US" sz="3600" dirty="0"/>
+              <a:t>API &amp; Documentation</a:t>
+            </a:r>
+          </a:p>
+          <a:p>
+            <a:pPr marL="0" marR="0" lvl="0" indent="0" defTabSz="914400" eaLnBrk="1" fontAlgn="auto" latinLnBrk="0" hangingPunct="1">
+              <a:lnSpc>
+                <a:spcPct val="100000"/>
+              </a:lnSpc>
+              <a:spcBef>
+                <a:spcPts val="0"/>
+              </a:spcBef>
+              <a:spcAft>
+                <a:spcPts val="0"/>
+              </a:spcAft>
+              <a:buClrTx/>
+              <a:buSzTx/>
+              <a:buFontTx/>
+              <a:buNone/>
+              <a:tabLst/>
+              <a:defRPr/>
+            </a:pPr>
+            <a:endParaRPr lang="en-US" sz="3600" dirty="0"/>
+          </a:p>
+          <a:p>
+            <a:pPr marL="0" indent="0">
+              <a:buNone/>
+            </a:pPr>
+            <a:r>
+              <a:rPr lang="en-US" sz="2800" b="1" dirty="0">
+                <a:hlinkClick r:id="rId3"/>
+              </a:rPr>
+              <a:t>1. Spark Data Sources</a:t>
+            </a:r>
+            <a:endParaRPr lang="en-US" sz="2800" b="1" dirty="0"/>
+          </a:p>
+          <a:p>
+            <a:pPr marL="0" indent="0" defTabSz="914400">
+              <a:spcBef>
+                <a:spcPts val="0"/>
+              </a:spcBef>
+              <a:buClrTx/>
+              <a:buSzTx/>
+              <a:buNone/>
+              <a:defRPr/>
+            </a:pPr>
+            <a:endParaRPr lang="en-US" sz="2400" b="1" dirty="0">
+              <a:hlinkClick r:id="rId4"/>
+            </a:endParaRPr>
+          </a:p>
+          <a:p>
+            <a:pPr marL="0" marR="0" lvl="0" indent="0" defTabSz="914400" eaLnBrk="1" fontAlgn="auto" latinLnBrk="0" hangingPunct="1">
+              <a:lnSpc>
+                <a:spcPct val="100000"/>
+              </a:lnSpc>
+              <a:spcBef>
+                <a:spcPts val="0"/>
+              </a:spcBef>
+              <a:spcAft>
+                <a:spcPts val="0"/>
+              </a:spcAft>
+              <a:buClrTx/>
+              <a:buSzTx/>
+              <a:buNone/>
+              <a:tabLst/>
+              <a:defRPr/>
+            </a:pPr>
+            <a:endParaRPr lang="en-US" sz="4000" dirty="0"/>
+          </a:p>
+        </p:txBody>
+      </p:sp>
+      <p:sp>
+        <p:nvSpPr>
+          <p:cNvPr id="4" name="Slide Number Placeholder 3"/>
+          <p:cNvSpPr>
+            <a:spLocks noGrp="1"/>
+          </p:cNvSpPr>
+          <p:nvPr>
+            <p:ph type="sldNum" sz="quarter" idx="4294967295"/>
+          </p:nvPr>
+        </p:nvSpPr>
+        <p:spPr>
+          <a:xfrm>
+            <a:off x="8585200" y="4786313"/>
+            <a:ext cx="558800" cy="273050"/>
+          </a:xfrm>
+          <a:prstGeom prst="rect">
+            <a:avLst/>
+          </a:prstGeom>
+        </p:spPr>
+        <p:txBody>
+          <a:bodyPr/>
+          <a:lstStyle/>
+          <a:p>
+            <a:pPr>
+              <a:defRPr/>
+            </a:pPr>
+            <a:fld id="{9F03A678-4452-844A-9F06-1DF79E40D900}" type="slidenum">
+              <a:rPr lang="en-US" smtClean="0"/>
+              <a:pPr>
+                <a:defRPr/>
+              </a:pPr>
+              <a:t>51</a:t>
+            </a:fld>
+            <a:endParaRPr lang="en-US" dirty="0"/>
+          </a:p>
+        </p:txBody>
+      </p:sp>
+    </p:spTree>
+    <p:extLst>
+      <p:ext uri="{BB962C8B-B14F-4D97-AF65-F5344CB8AC3E}">
+        <p14:creationId xmlns:p14="http://schemas.microsoft.com/office/powerpoint/2010/main" val="1673106568"/>
+      </p:ext>
+    </p:extLst>
+  </p:cSld>
+  <p:clrMapOvr>
+    <a:masterClrMapping/>
+  </p:clrMapOvr>
+</p:sld>
+</file>
+
+<file path=ppt/slides/slide52.xml><?xml version="1.0" encoding="utf-8"?>
+<p:sld xmlns:a="http://schemas.openxmlformats.org/drawingml/2006/main" xmlns:r="http://schemas.openxmlformats.org/officeDocument/2006/relationships" xmlns:p="http://schemas.openxmlformats.org/presentationml/2006/main">
+  <p:cSld>
+    <p:spTree>
+      <p:nvGrpSpPr>
+        <p:cNvPr id="1" name=""/>
+        <p:cNvGrpSpPr/>
+        <p:nvPr/>
+      </p:nvGrpSpPr>
+      <p:grpSpPr>
+        <a:xfrm>
+          <a:off x="0" y="0"/>
+          <a:ext cx="0" cy="0"/>
+          <a:chOff x="0" y="0"/>
+          <a:chExt cx="0" cy="0"/>
+        </a:xfrm>
+      </p:grpSpPr>
+      <p:sp>
+        <p:nvSpPr>
+          <p:cNvPr id="3" name="Content Placeholder 2"/>
+          <p:cNvSpPr>
+            <a:spLocks noGrp="1"/>
+          </p:cNvSpPr>
+          <p:nvPr>
+            <p:ph idx="1"/>
+          </p:nvPr>
+        </p:nvSpPr>
+        <p:spPr>
+          <a:xfrm>
+            <a:off x="541991" y="424329"/>
+            <a:ext cx="7172325" cy="3968377"/>
+          </a:xfrm>
+        </p:spPr>
+        <p:txBody>
+          <a:bodyPr>
+            <a:normAutofit/>
+          </a:bodyPr>
+          <a:lstStyle/>
+          <a:p>
+            <a:pPr marL="0" marR="0" lvl="0" indent="0" defTabSz="914400" eaLnBrk="1" fontAlgn="auto" latinLnBrk="0" hangingPunct="1">
+              <a:lnSpc>
+                <a:spcPct val="100000"/>
+              </a:lnSpc>
+              <a:spcBef>
+                <a:spcPts val="0"/>
+              </a:spcBef>
+              <a:spcAft>
+                <a:spcPts val="0"/>
+              </a:spcAft>
+              <a:buClrTx/>
+              <a:buSzTx/>
+              <a:buFontTx/>
+              <a:buNone/>
+              <a:tabLst/>
+              <a:defRPr/>
+            </a:pPr>
+            <a:r>
+              <a:rPr lang="en-US" sz="4000" dirty="0"/>
+              <a:t>Spark Data Sources Tutorials</a:t>
+            </a:r>
+          </a:p>
+          <a:p>
+            <a:pPr marL="0" indent="0" defTabSz="914400">
+              <a:spcBef>
+                <a:spcPts val="0"/>
+              </a:spcBef>
+              <a:buClrTx/>
+              <a:buSzTx/>
+              <a:buNone/>
+              <a:defRPr/>
+            </a:pPr>
+            <a:endParaRPr lang="en-US" sz="2400" b="1" dirty="0">
+              <a:hlinkClick r:id="rId3"/>
+            </a:endParaRPr>
+          </a:p>
+          <a:p>
+            <a:pPr marL="0" indent="0" defTabSz="914400">
+              <a:spcBef>
+                <a:spcPts val="0"/>
+              </a:spcBef>
+              <a:buClrTx/>
+              <a:buSzTx/>
+              <a:buNone/>
+              <a:defRPr/>
+            </a:pPr>
+            <a:r>
+              <a:rPr lang="en-US" sz="2800" b="1" dirty="0">
+                <a:hlinkClick r:id="rId4"/>
+              </a:rPr>
+              <a:t>1. Data Engineering 101 – Data Sources in Spark</a:t>
+            </a:r>
+            <a:endParaRPr lang="en-US" sz="2800" b="1" dirty="0"/>
+          </a:p>
+          <a:p>
+            <a:pPr marL="0" indent="0" defTabSz="914400">
+              <a:spcBef>
+                <a:spcPts val="0"/>
+              </a:spcBef>
+              <a:buClrTx/>
+              <a:buSzTx/>
+              <a:buNone/>
+              <a:defRPr/>
+            </a:pPr>
+            <a:endParaRPr lang="en-US" sz="2400" b="1" dirty="0"/>
+          </a:p>
+          <a:p>
+            <a:pPr marL="0" marR="0" lvl="0" indent="0" defTabSz="914400" eaLnBrk="1" fontAlgn="auto" latinLnBrk="0" hangingPunct="1">
+              <a:lnSpc>
+                <a:spcPct val="100000"/>
+              </a:lnSpc>
+              <a:spcBef>
+                <a:spcPts val="0"/>
+              </a:spcBef>
+              <a:spcAft>
+                <a:spcPts val="0"/>
+              </a:spcAft>
+              <a:buClrTx/>
+              <a:buSzTx/>
+              <a:buNone/>
+              <a:tabLst/>
+              <a:defRPr/>
+            </a:pPr>
+            <a:endParaRPr lang="en-US" sz="4000" dirty="0"/>
+          </a:p>
+        </p:txBody>
+      </p:sp>
+      <p:sp>
+        <p:nvSpPr>
+          <p:cNvPr id="4" name="Slide Number Placeholder 3"/>
+          <p:cNvSpPr>
+            <a:spLocks noGrp="1"/>
+          </p:cNvSpPr>
+          <p:nvPr>
+            <p:ph type="sldNum" sz="quarter" idx="4294967295"/>
+          </p:nvPr>
+        </p:nvSpPr>
+        <p:spPr>
+          <a:xfrm>
+            <a:off x="8585200" y="4786313"/>
+            <a:ext cx="558800" cy="273050"/>
+          </a:xfrm>
+          <a:prstGeom prst="rect">
+            <a:avLst/>
+          </a:prstGeom>
+        </p:spPr>
+        <p:txBody>
+          <a:bodyPr/>
+          <a:lstStyle/>
+          <a:p>
+            <a:pPr>
+              <a:defRPr/>
+            </a:pPr>
+            <a:fld id="{9F03A678-4452-844A-9F06-1DF79E40D900}" type="slidenum">
+              <a:rPr lang="en-US" smtClean="0"/>
+              <a:pPr>
+                <a:defRPr/>
+              </a:pPr>
+              <a:t>52</a:t>
+            </a:fld>
+            <a:endParaRPr lang="en-US" dirty="0"/>
+          </a:p>
+        </p:txBody>
+      </p:sp>
+    </p:spTree>
+    <p:extLst>
+      <p:ext uri="{BB962C8B-B14F-4D97-AF65-F5344CB8AC3E}">
+        <p14:creationId xmlns:p14="http://schemas.microsoft.com/office/powerpoint/2010/main" val="3465952970"/>
+      </p:ext>
+    </p:extLst>
+  </p:cSld>
+  <p:clrMapOvr>
+    <a:masterClrMapping/>
+  </p:clrMapOvr>
+</p:sld>
+</file>
+
+<file path=ppt/slides/slide53.xml><?xml version="1.0" encoding="utf-8"?>
+<p:sld xmlns:a="http://schemas.openxmlformats.org/drawingml/2006/main" xmlns:r="http://schemas.openxmlformats.org/officeDocument/2006/relationships" xmlns:p="http://schemas.openxmlformats.org/presentationml/2006/main">
+  <p:cSld>
+    <p:spTree>
+      <p:nvGrpSpPr>
+        <p:cNvPr id="1" name=""/>
+        <p:cNvGrpSpPr/>
+        <p:nvPr/>
+      </p:nvGrpSpPr>
+      <p:grpSpPr>
+        <a:xfrm>
+          <a:off x="0" y="0"/>
+          <a:ext cx="0" cy="0"/>
+          <a:chOff x="0" y="0"/>
+          <a:chExt cx="0" cy="0"/>
+        </a:xfrm>
+      </p:grpSpPr>
+      <p:sp>
+        <p:nvSpPr>
+          <p:cNvPr id="3" name="Content Placeholder 2"/>
+          <p:cNvSpPr>
+            <a:spLocks noGrp="1"/>
+          </p:cNvSpPr>
+          <p:nvPr>
+            <p:ph idx="1"/>
+          </p:nvPr>
+        </p:nvSpPr>
+        <p:spPr>
+          <a:xfrm>
+            <a:off x="541991" y="424329"/>
+            <a:ext cx="7172325" cy="4361984"/>
+          </a:xfrm>
+        </p:spPr>
+        <p:txBody>
+          <a:bodyPr>
+            <a:normAutofit/>
+          </a:bodyPr>
+          <a:lstStyle/>
+          <a:p>
+            <a:pPr marL="0" indent="0" defTabSz="914400">
+              <a:spcBef>
+                <a:spcPts val="0"/>
+              </a:spcBef>
+              <a:buClrTx/>
+              <a:buSzTx/>
+              <a:buNone/>
+              <a:defRPr/>
+            </a:pPr>
+            <a:r>
+              <a:rPr lang="en-US" sz="4000" dirty="0"/>
+              <a:t>Spark Data Sources Videos</a:t>
+            </a:r>
+          </a:p>
+          <a:p>
+            <a:pPr marL="0" indent="0" defTabSz="914400">
+              <a:spcBef>
+                <a:spcPts val="0"/>
+              </a:spcBef>
+              <a:buClrTx/>
+              <a:buSzTx/>
+              <a:buNone/>
+              <a:defRPr/>
+            </a:pPr>
+            <a:endParaRPr lang="en-US" sz="2400" b="1" dirty="0">
+              <a:hlinkClick r:id="rId3"/>
+            </a:endParaRPr>
+          </a:p>
+          <a:p>
+            <a:pPr marL="0" indent="0" defTabSz="914400">
+              <a:spcBef>
+                <a:spcPts val="0"/>
+              </a:spcBef>
+              <a:buClrTx/>
+              <a:buSzTx/>
+              <a:buNone/>
+              <a:defRPr/>
+            </a:pPr>
+            <a:r>
+              <a:rPr lang="en-US" sz="4400" dirty="0">
+                <a:hlinkClick r:id="rId4"/>
+              </a:rPr>
+              <a:t>1. Spark Tutorial - Data Sources</a:t>
+            </a:r>
+            <a:endParaRPr lang="en-US" sz="2400" b="1" dirty="0"/>
+          </a:p>
+          <a:p>
+            <a:pPr lvl="1" defTabSz="914400">
+              <a:spcBef>
+                <a:spcPts val="0"/>
+              </a:spcBef>
+              <a:buClrTx/>
+              <a:buSzTx/>
+              <a:defRPr/>
+            </a:pPr>
+            <a:r>
+              <a:rPr lang="en-US" sz="3800" dirty="0"/>
+              <a:t>  Video, </a:t>
+            </a:r>
+            <a:r>
+              <a:rPr lang="en-US" sz="3800"/>
+              <a:t>15 minutes</a:t>
+            </a:r>
+            <a:endParaRPr lang="en-US" sz="3800" dirty="0"/>
+          </a:p>
+        </p:txBody>
+      </p:sp>
+      <p:sp>
+        <p:nvSpPr>
+          <p:cNvPr id="4" name="Slide Number Placeholder 3"/>
+          <p:cNvSpPr>
+            <a:spLocks noGrp="1"/>
+          </p:cNvSpPr>
+          <p:nvPr>
+            <p:ph type="sldNum" sz="quarter" idx="4294967295"/>
+          </p:nvPr>
+        </p:nvSpPr>
+        <p:spPr>
+          <a:xfrm>
+            <a:off x="8585200" y="4786313"/>
+            <a:ext cx="558800" cy="273050"/>
+          </a:xfrm>
+          <a:prstGeom prst="rect">
+            <a:avLst/>
+          </a:prstGeom>
+        </p:spPr>
+        <p:txBody>
+          <a:bodyPr/>
+          <a:lstStyle/>
+          <a:p>
+            <a:pPr>
+              <a:defRPr/>
+            </a:pPr>
+            <a:fld id="{9F03A678-4452-844A-9F06-1DF79E40D900}" type="slidenum">
+              <a:rPr lang="en-US" smtClean="0"/>
+              <a:pPr>
+                <a:defRPr/>
+              </a:pPr>
+              <a:t>53</a:t>
+            </a:fld>
+            <a:endParaRPr lang="en-US" dirty="0"/>
+          </a:p>
+        </p:txBody>
+      </p:sp>
+    </p:spTree>
+    <p:extLst>
+      <p:ext uri="{BB962C8B-B14F-4D97-AF65-F5344CB8AC3E}">
+        <p14:creationId xmlns:p14="http://schemas.microsoft.com/office/powerpoint/2010/main" val="2752453297"/>
+      </p:ext>
+    </p:extLst>
+  </p:cSld>
+  <p:clrMapOvr>
+    <a:masterClrMapping/>
+  </p:clrMapOvr>
 </p:sld>
 </file>
 
